--- a/media/module2/slides.pptx
+++ b/media/module2/slides.pptx
@@ -3109,8 +3109,8 @@
         </p:nvSpPr>
         <p:spPr>
           <a:xfrm>
-            <a:off x="548640" y="2011680"/>
-            <a:ext cx="11064240" cy="2286000"/>
+            <a:off x="548640" y="1828800"/>
+            <a:ext cx="11064240" cy="2743200"/>
           </a:xfrm>
           <a:prstGeom prst="rect">
             <a:avLst/>
@@ -3119,15 +3119,22 @@
         </p:spPr>
         <p:txBody>
           <a:bodyPr wrap="square">
-            <a:spAutoFit/>
+            <a:noAutofit/>
           </a:bodyPr>
           <a:lstStyle/>
           <a:p>
             <a:pPr algn="ctr">
-              <a:defRPr sz="4400" b="1">
+              <a:lnSpc>
+                <a:spcPts val="2200"/>
+              </a:lnSpc>
+              <a:spcAft>
+                <a:spcPts val="400"/>
+              </a:spcAft>
+              <a:defRPr sz="4000" b="1">
                 <a:solidFill>
                   <a:srgbClr val="1A1A2E"/>
                 </a:solidFill>
+                <a:latin typeface="Calibri"/>
               </a:defRPr>
             </a:pPr>
             <a:r>
@@ -3136,13 +3143,17 @@
           </a:p>
           <a:p>
             <a:pPr algn="ctr">
+              <a:lnSpc>
+                <a:spcPts val="2200"/>
+              </a:lnSpc>
               <a:spcBef>
-                <a:spcPts val="1200"/>
+                <a:spcPts val="1400"/>
               </a:spcBef>
-              <a:defRPr sz="3200">
+              <a:defRPr sz="2600" b="0">
                 <a:solidFill>
                   <a:srgbClr val="333333"/>
                 </a:solidFill>
+                <a:latin typeface="Calibri"/>
               </a:defRPr>
             </a:pPr>
             <a:r>
@@ -3168,16 +3179,20 @@
           <a:noFill/>
         </p:spPr>
         <p:txBody>
-          <a:bodyPr wrap="none">
-            <a:spAutoFit/>
+          <a:bodyPr wrap="square">
+            <a:noAutofit/>
           </a:bodyPr>
           <a:lstStyle/>
           <a:p>
             <a:pPr algn="r">
-              <a:defRPr sz="1000">
+              <a:lnSpc>
+                <a:spcPts val="2200"/>
+              </a:lnSpc>
+              <a:defRPr sz="1000" b="0">
                 <a:solidFill>
                   <a:srgbClr val="666666"/>
                 </a:solidFill>
+                <a:latin typeface="Calibri"/>
               </a:defRPr>
             </a:pPr>
             <a:r>
@@ -3212,8 +3227,8 @@
         </p:nvSpPr>
         <p:spPr>
           <a:xfrm>
-            <a:off x="548640" y="457200"/>
-            <a:ext cx="11064240" cy="731520"/>
+            <a:off x="548640" y="411480"/>
+            <a:ext cx="11064240" cy="777240"/>
           </a:xfrm>
           <a:prstGeom prst="rect">
             <a:avLst/>
@@ -3221,16 +3236,20 @@
           <a:noFill/>
         </p:spPr>
         <p:txBody>
-          <a:bodyPr wrap="none">
-            <a:spAutoFit/>
+          <a:bodyPr wrap="square">
+            <a:noAutofit/>
           </a:bodyPr>
           <a:lstStyle/>
           <a:p>
             <a:pPr>
-              <a:defRPr sz="3200" b="1">
+              <a:lnSpc>
+                <a:spcPts val="2200"/>
+              </a:lnSpc>
+              <a:defRPr sz="2800" b="1">
                 <a:solidFill>
                   <a:srgbClr val="1A1A2E"/>
                 </a:solidFill>
+                <a:latin typeface="Calibri"/>
               </a:defRPr>
             </a:pPr>
             <a:r>
@@ -3247,22 +3266,33 @@
         </p:nvSpPr>
         <p:spPr>
           <a:xfrm>
-            <a:off x="548640" y="1143000"/>
-            <a:ext cx="11064240" cy="548640"/>
+            <a:off x="548640" y="1051560"/>
+            <a:ext cx="11064240" cy="914400"/>
           </a:xfrm>
           <a:prstGeom prst="rect">
             <a:avLst/>
           </a:prstGeom>
-          <a:noFill/>
-        </p:spPr>
-        <p:txBody>
-          <a:bodyPr wrap="none">
-            <a:spAutoFit/>
+          <a:solidFill>
+            <a:srgbClr val="F4F4F4"/>
+          </a:solidFill>
+        </p:spPr>
+        <p:txBody>
+          <a:bodyPr wrap="square">
+            <a:noAutofit/>
           </a:bodyPr>
           <a:lstStyle/>
           <a:p>
             <a:pPr>
-              <a:defRPr sz="1400">
+              <a:lnSpc>
+                <a:spcPts val="2200"/>
+              </a:lnSpc>
+              <a:spcAft>
+                <a:spcPts val="200"/>
+              </a:spcAft>
+              <a:defRPr sz="2000" b="0">
+                <a:solidFill>
+                  <a:srgbClr val="333333"/>
+                </a:solidFill>
                 <a:latin typeface="Consolas"/>
               </a:defRPr>
             </a:pPr>
@@ -3288,8 +3318,8 @@
         </p:blipFill>
         <p:spPr>
           <a:xfrm>
-            <a:off x="548640" y="1828800"/>
-            <a:ext cx="11064240" cy="3840480"/>
+            <a:off x="548640" y="1965960"/>
+            <a:ext cx="7071358" cy="3977639"/>
           </a:xfrm>
           <a:prstGeom prst="rect">
             <a:avLst/>
@@ -3313,16 +3343,20 @@
           <a:noFill/>
         </p:spPr>
         <p:txBody>
-          <a:bodyPr wrap="none">
-            <a:spAutoFit/>
+          <a:bodyPr wrap="square">
+            <a:noAutofit/>
           </a:bodyPr>
           <a:lstStyle/>
           <a:p>
             <a:pPr algn="r">
-              <a:defRPr sz="1000">
+              <a:lnSpc>
+                <a:spcPts val="2200"/>
+              </a:lnSpc>
+              <a:defRPr sz="1000" b="0">
                 <a:solidFill>
                   <a:srgbClr val="666666"/>
                 </a:solidFill>
+                <a:latin typeface="Calibri"/>
               </a:defRPr>
             </a:pPr>
             <a:r>
@@ -3366,13 +3400,21 @@
           <a:noFill/>
         </p:spPr>
         <p:txBody>
-          <a:bodyPr wrap="none">
-            <a:spAutoFit/>
+          <a:bodyPr wrap="square">
+            <a:noAutofit/>
           </a:bodyPr>
           <a:lstStyle/>
           <a:p>
             <a:pPr algn="ctr">
-              <a:defRPr sz="4000" b="1"/>
+              <a:lnSpc>
+                <a:spcPts val="2200"/>
+              </a:lnSpc>
+              <a:defRPr sz="3600" b="1">
+                <a:solidFill>
+                  <a:srgbClr val="1A1A2E"/>
+                </a:solidFill>
+                <a:latin typeface="Calibri"/>
+              </a:defRPr>
             </a:pPr>
             <a:r>
               <a:t>Practice</a:t>
@@ -3397,16 +3439,20 @@
           <a:noFill/>
         </p:spPr>
         <p:txBody>
-          <a:bodyPr wrap="none">
-            <a:spAutoFit/>
+          <a:bodyPr wrap="square">
+            <a:noAutofit/>
           </a:bodyPr>
           <a:lstStyle/>
           <a:p>
             <a:pPr algn="r">
-              <a:defRPr sz="1000">
+              <a:lnSpc>
+                <a:spcPts val="2200"/>
+              </a:lnSpc>
+              <a:defRPr sz="1000" b="0">
                 <a:solidFill>
                   <a:srgbClr val="666666"/>
                 </a:solidFill>
+                <a:latin typeface="Calibri"/>
               </a:defRPr>
             </a:pPr>
             <a:r>
@@ -3441,8 +3487,8 @@
         </p:nvSpPr>
         <p:spPr>
           <a:xfrm>
-            <a:off x="548640" y="457200"/>
-            <a:ext cx="11064240" cy="731520"/>
+            <a:off x="548640" y="411480"/>
+            <a:ext cx="11064240" cy="777240"/>
           </a:xfrm>
           <a:prstGeom prst="rect">
             <a:avLst/>
@@ -3450,16 +3496,20 @@
           <a:noFill/>
         </p:spPr>
         <p:txBody>
-          <a:bodyPr wrap="none">
-            <a:spAutoFit/>
+          <a:bodyPr wrap="square">
+            <a:noAutofit/>
           </a:bodyPr>
           <a:lstStyle/>
           <a:p>
             <a:pPr>
-              <a:defRPr sz="3200" b="1">
+              <a:lnSpc>
+                <a:spcPts val="2200"/>
+              </a:lnSpc>
+              <a:defRPr sz="2800" b="1">
                 <a:solidFill>
                   <a:srgbClr val="1A1A2E"/>
                 </a:solidFill>
+                <a:latin typeface="Calibri"/>
               </a:defRPr>
             </a:pPr>
             <a:r>
@@ -3476,7 +3526,7 @@
         </p:nvSpPr>
         <p:spPr>
           <a:xfrm>
-            <a:off x="548640" y="1234440"/>
+            <a:off x="548640" y="1143000"/>
             <a:ext cx="11064240" cy="5029200"/>
           </a:xfrm>
           <a:prstGeom prst="rect">
@@ -3488,12 +3538,18 @@
         </p:spPr>
         <p:txBody>
           <a:bodyPr wrap="square">
-            <a:spAutoFit/>
+            <a:noAutofit/>
           </a:bodyPr>
           <a:lstStyle/>
           <a:p>
             <a:pPr>
-              <a:defRPr sz="1400">
+              <a:lnSpc>
+                <a:spcPts val="2200"/>
+              </a:lnSpc>
+              <a:spcAft>
+                <a:spcPts val="400"/>
+              </a:spcAft>
+              <a:defRPr sz="2000" b="0">
                 <a:solidFill>
                   <a:srgbClr val="333333"/>
                 </a:solidFill>
@@ -3523,16 +3579,20 @@
           <a:noFill/>
         </p:spPr>
         <p:txBody>
-          <a:bodyPr wrap="none">
-            <a:spAutoFit/>
+          <a:bodyPr wrap="square">
+            <a:noAutofit/>
           </a:bodyPr>
           <a:lstStyle/>
           <a:p>
             <a:pPr algn="r">
-              <a:defRPr sz="1000">
+              <a:lnSpc>
+                <a:spcPts val="2200"/>
+              </a:lnSpc>
+              <a:defRPr sz="1000" b="0">
                 <a:solidFill>
                   <a:srgbClr val="666666"/>
                 </a:solidFill>
+                <a:latin typeface="Calibri"/>
               </a:defRPr>
             </a:pPr>
             <a:r>
@@ -3567,8 +3627,8 @@
         </p:nvSpPr>
         <p:spPr>
           <a:xfrm>
-            <a:off x="548640" y="457200"/>
-            <a:ext cx="11064240" cy="731520"/>
+            <a:off x="548640" y="411480"/>
+            <a:ext cx="11064240" cy="777240"/>
           </a:xfrm>
           <a:prstGeom prst="rect">
             <a:avLst/>
@@ -3576,16 +3636,20 @@
           <a:noFill/>
         </p:spPr>
         <p:txBody>
-          <a:bodyPr wrap="none">
-            <a:spAutoFit/>
+          <a:bodyPr wrap="square">
+            <a:noAutofit/>
           </a:bodyPr>
           <a:lstStyle/>
           <a:p>
             <a:pPr>
-              <a:defRPr sz="3200" b="1">
+              <a:lnSpc>
+                <a:spcPts val="2200"/>
+              </a:lnSpc>
+              <a:defRPr sz="2800" b="1">
                 <a:solidFill>
                   <a:srgbClr val="1A1A2E"/>
                 </a:solidFill>
+                <a:latin typeface="Calibri"/>
               </a:defRPr>
             </a:pPr>
             <a:r>
@@ -3602,8 +3666,8 @@
         </p:nvSpPr>
         <p:spPr>
           <a:xfrm>
-            <a:off x="548640" y="1280160"/>
-            <a:ext cx="11064240" cy="4754880"/>
+            <a:off x="548640" y="1234440"/>
+            <a:ext cx="11064240" cy="4937760"/>
           </a:xfrm>
           <a:prstGeom prst="rect">
             <a:avLst/>
@@ -3612,52 +3676,64 @@
         </p:spPr>
         <p:txBody>
           <a:bodyPr wrap="square">
-            <a:spAutoFit/>
+            <a:noAutofit/>
           </a:bodyPr>
           <a:lstStyle/>
           <a:p>
             <a:pPr>
+              <a:lnSpc>
+                <a:spcPts val="2200"/>
+              </a:lnSpc>
               <a:spcAft>
-                <a:spcPts val="800"/>
+                <a:spcPts val="1000"/>
               </a:spcAft>
-              <a:defRPr sz="2000">
+              <a:defRPr sz="2000" b="0">
                 <a:solidFill>
                   <a:srgbClr val="333333"/>
                 </a:solidFill>
+                <a:latin typeface="Calibri"/>
               </a:defRPr>
             </a:pPr>
             <a:r>
-              <a:t>chmod on ~/unix_practice/hello.sh</a:t>
+              <a:t>• chmod on ~/unix_practice/hello.sh</a:t>
             </a:r>
           </a:p>
           <a:p>
             <a:pPr>
+              <a:lnSpc>
+                <a:spcPts val="2200"/>
+              </a:lnSpc>
               <a:spcAft>
-                <a:spcPts val="800"/>
+                <a:spcPts val="1000"/>
               </a:spcAft>
-              <a:defRPr sz="2000">
+              <a:defRPr sz="2000" b="0">
                 <a:solidFill>
                   <a:srgbClr val="333333"/>
                 </a:solidFill>
+                <a:latin typeface="Calibri"/>
               </a:defRPr>
             </a:pPr>
             <a:r>
-              <a:t>echo $PATH and which for git</a:t>
+              <a:t>• echo $PATH and which for git</a:t>
             </a:r>
           </a:p>
           <a:p>
             <a:pPr>
+              <a:lnSpc>
+                <a:spcPts val="2200"/>
+              </a:lnSpc>
               <a:spcAft>
-                <a:spcPts val="800"/>
+                <a:spcPts val="1000"/>
               </a:spcAft>
-              <a:defRPr sz="2000">
+              <a:defRPr sz="2000" b="0">
                 <a:solidFill>
                   <a:srgbClr val="333333"/>
                 </a:solidFill>
+                <a:latin typeface="Calibri"/>
               </a:defRPr>
             </a:pPr>
             <a:r>
-              <a:t>ls -la to see dotfiles in examples/dotfiles</a:t>
+              <a:t>• ls -la to see dotfiles in examples/dotfiles</a:t>
             </a:r>
           </a:p>
         </p:txBody>
@@ -3679,16 +3755,20 @@
           <a:noFill/>
         </p:spPr>
         <p:txBody>
-          <a:bodyPr wrap="none">
-            <a:spAutoFit/>
+          <a:bodyPr wrap="square">
+            <a:noAutofit/>
           </a:bodyPr>
           <a:lstStyle/>
           <a:p>
             <a:pPr algn="r">
-              <a:defRPr sz="1000">
+              <a:lnSpc>
+                <a:spcPts val="2200"/>
+              </a:lnSpc>
+              <a:defRPr sz="1000" b="0">
                 <a:solidFill>
                   <a:srgbClr val="666666"/>
                 </a:solidFill>
+                <a:latin typeface="Calibri"/>
               </a:defRPr>
             </a:pPr>
             <a:r>
@@ -3723,8 +3803,8 @@
         </p:nvSpPr>
         <p:spPr>
           <a:xfrm>
-            <a:off x="548640" y="457200"/>
-            <a:ext cx="11064240" cy="731520"/>
+            <a:off x="548640" y="411480"/>
+            <a:ext cx="11064240" cy="777240"/>
           </a:xfrm>
           <a:prstGeom prst="rect">
             <a:avLst/>
@@ -3732,16 +3812,20 @@
           <a:noFill/>
         </p:spPr>
         <p:txBody>
-          <a:bodyPr wrap="none">
-            <a:spAutoFit/>
+          <a:bodyPr wrap="square">
+            <a:noAutofit/>
           </a:bodyPr>
           <a:lstStyle/>
           <a:p>
             <a:pPr>
-              <a:defRPr sz="3200" b="1">
+              <a:lnSpc>
+                <a:spcPts val="2200"/>
+              </a:lnSpc>
+              <a:defRPr sz="2800" b="1">
                 <a:solidFill>
                   <a:srgbClr val="1A1A2E"/>
                 </a:solidFill>
+                <a:latin typeface="Calibri"/>
               </a:defRPr>
             </a:pPr>
             <a:r>
@@ -3758,8 +3842,8 @@
         </p:nvSpPr>
         <p:spPr>
           <a:xfrm>
-            <a:off x="548640" y="1280160"/>
-            <a:ext cx="11064240" cy="4754880"/>
+            <a:off x="548640" y="1234440"/>
+            <a:ext cx="11064240" cy="4937760"/>
           </a:xfrm>
           <a:prstGeom prst="rect">
             <a:avLst/>
@@ -3768,67 +3852,83 @@
         </p:spPr>
         <p:txBody>
           <a:bodyPr wrap="square">
-            <a:spAutoFit/>
+            <a:noAutofit/>
           </a:bodyPr>
           <a:lstStyle/>
           <a:p>
             <a:pPr>
+              <a:lnSpc>
+                <a:spcPts val="2200"/>
+              </a:lnSpc>
               <a:spcAft>
-                <a:spcPts val="800"/>
+                <a:spcPts val="1000"/>
               </a:spcAft>
-              <a:defRPr sz="2000">
+              <a:defRPr sz="2000" b="0">
                 <a:solidFill>
                   <a:srgbClr val="333333"/>
                 </a:solidFill>
+                <a:latin typeface="Calibri"/>
               </a:defRPr>
             </a:pPr>
             <a:r>
-              <a:t>File types and rwx permissions</a:t>
+              <a:t>• File types and rwx permissions</a:t>
             </a:r>
           </a:p>
           <a:p>
             <a:pPr>
+              <a:lnSpc>
+                <a:spcPts val="2200"/>
+              </a:lnSpc>
               <a:spcAft>
-                <a:spcPts val="800"/>
+                <a:spcPts val="1000"/>
               </a:spcAft>
-              <a:defRPr sz="2000">
+              <a:defRPr sz="2000" b="0">
                 <a:solidFill>
                   <a:srgbClr val="333333"/>
                 </a:solidFill>
+                <a:latin typeface="Calibri"/>
               </a:defRPr>
             </a:pPr>
             <a:r>
-              <a:t>PATH and environment</a:t>
+              <a:t>• PATH and environment</a:t>
             </a:r>
           </a:p>
           <a:p>
             <a:pPr>
+              <a:lnSpc>
+                <a:spcPts val="2200"/>
+              </a:lnSpc>
               <a:spcAft>
-                <a:spcPts val="800"/>
+                <a:spcPts val="1000"/>
               </a:spcAft>
-              <a:defRPr sz="2000">
+              <a:defRPr sz="2000" b="0">
                 <a:solidFill>
                   <a:srgbClr val="333333"/>
                 </a:solidFill>
+                <a:latin typeface="Calibri"/>
               </a:defRPr>
             </a:pPr>
             <a:r>
-              <a:t>Next: Module 3 — processes &amp; pipes</a:t>
+              <a:t>• Next: Module 3 — processes &amp; pipes</a:t>
             </a:r>
           </a:p>
           <a:p>
             <a:pPr>
+              <a:lnSpc>
+                <a:spcPts val="2200"/>
+              </a:lnSpc>
               <a:spcAft>
-                <a:spcPts val="800"/>
+                <a:spcPts val="1000"/>
               </a:spcAft>
-              <a:defRPr sz="2000">
+              <a:defRPr sz="2000" b="0">
                 <a:solidFill>
                   <a:srgbClr val="333333"/>
                 </a:solidFill>
+                <a:latin typeface="Calibri"/>
               </a:defRPr>
             </a:pPr>
             <a:r>
-              <a:t>Next: Module 3: Processes, Pipes &amp; Redirection</a:t>
+              <a:t>• Next: Module 3: Processes, Pipes &amp; Redirection</a:t>
             </a:r>
           </a:p>
         </p:txBody>
@@ -3850,16 +3950,20 @@
           <a:noFill/>
         </p:spPr>
         <p:txBody>
-          <a:bodyPr wrap="none">
-            <a:spAutoFit/>
+          <a:bodyPr wrap="square">
+            <a:noAutofit/>
           </a:bodyPr>
           <a:lstStyle/>
           <a:p>
             <a:pPr algn="r">
-              <a:defRPr sz="1000">
+              <a:lnSpc>
+                <a:spcPts val="2200"/>
+              </a:lnSpc>
+              <a:defRPr sz="1000" b="0">
                 <a:solidFill>
                   <a:srgbClr val="666666"/>
                 </a:solidFill>
+                <a:latin typeface="Calibri"/>
               </a:defRPr>
             </a:pPr>
             <a:r>
@@ -3894,8 +3998,8 @@
         </p:nvSpPr>
         <p:spPr>
           <a:xfrm>
-            <a:off x="548640" y="457200"/>
-            <a:ext cx="11064240" cy="731520"/>
+            <a:off x="548640" y="411480"/>
+            <a:ext cx="11064240" cy="777240"/>
           </a:xfrm>
           <a:prstGeom prst="rect">
             <a:avLst/>
@@ -3903,16 +4007,20 @@
           <a:noFill/>
         </p:spPr>
         <p:txBody>
-          <a:bodyPr wrap="none">
-            <a:spAutoFit/>
+          <a:bodyPr wrap="square">
+            <a:noAutofit/>
           </a:bodyPr>
           <a:lstStyle/>
           <a:p>
             <a:pPr>
-              <a:defRPr sz="3200" b="1">
+              <a:lnSpc>
+                <a:spcPts val="2200"/>
+              </a:lnSpc>
+              <a:defRPr sz="2800" b="1">
                 <a:solidFill>
                   <a:srgbClr val="1A1A2E"/>
                 </a:solidFill>
+                <a:latin typeface="Calibri"/>
               </a:defRPr>
             </a:pPr>
             <a:r>
@@ -3929,8 +4037,8 @@
         </p:nvSpPr>
         <p:spPr>
           <a:xfrm>
-            <a:off x="548640" y="1280160"/>
-            <a:ext cx="11064240" cy="4754880"/>
+            <a:off x="548640" y="1234440"/>
+            <a:ext cx="11064240" cy="4937760"/>
           </a:xfrm>
           <a:prstGeom prst="rect">
             <a:avLst/>
@@ -3939,67 +4047,102 @@
         </p:spPr>
         <p:txBody>
           <a:bodyPr wrap="square">
-            <a:spAutoFit/>
+            <a:noAutofit/>
           </a:bodyPr>
           <a:lstStyle/>
           <a:p>
             <a:pPr>
+              <a:lnSpc>
+                <a:spcPts val="2200"/>
+              </a:lnSpc>
               <a:spcAft>
-                <a:spcPts val="800"/>
+                <a:spcPts val="1000"/>
               </a:spcAft>
-              <a:defRPr sz="2000">
+              <a:defRPr sz="2000" b="0">
                 <a:solidFill>
                   <a:srgbClr val="333333"/>
                 </a:solidFill>
+                <a:latin typeface="Calibri"/>
               </a:defRPr>
             </a:pPr>
             <a:r>
-              <a:t>Read ls -l output (types, permissions, owner)</a:t>
+              <a:t>• Read ls -l output (types, permissions, owner)</a:t>
             </a:r>
           </a:p>
           <a:p>
             <a:pPr>
+              <a:lnSpc>
+                <a:spcPts val="2200"/>
+              </a:lnSpc>
               <a:spcAft>
-                <a:spcPts val="800"/>
+                <a:spcPts val="1000"/>
               </a:spcAft>
-              <a:defRPr sz="2000">
+              <a:defRPr sz="2000" b="0">
                 <a:solidFill>
                   <a:srgbClr val="333333"/>
                 </a:solidFill>
+                <a:latin typeface="Calibri"/>
               </a:defRPr>
             </a:pPr>
             <a:r>
-              <a:t>Use chmod to make scripts executable safely</a:t>
+              <a:t>• Use chmod to make scripts executable safely</a:t>
             </a:r>
           </a:p>
           <a:p>
             <a:pPr>
+              <a:lnSpc>
+                <a:spcPts val="2200"/>
+              </a:lnSpc>
               <a:spcAft>
-                <a:spcPts val="800"/>
+                <a:spcPts val="1000"/>
               </a:spcAft>
-              <a:defRPr sz="2000">
+              <a:defRPr sz="2000" b="0">
                 <a:solidFill>
                   <a:srgbClr val="333333"/>
                 </a:solidFill>
+                <a:latin typeface="Calibri"/>
               </a:defRPr>
             </a:pPr>
             <a:r>
-              <a:t>Explain HOME, PATH, and which</a:t>
+              <a:t>• Explain HOME, PATH, and which</a:t>
             </a:r>
           </a:p>
           <a:p>
             <a:pPr>
+              <a:lnSpc>
+                <a:spcPts val="2200"/>
+              </a:lnSpc>
               <a:spcAft>
-                <a:spcPts val="800"/>
+                <a:spcPts val="1000"/>
               </a:spcAft>
-              <a:defRPr sz="2000">
+              <a:defRPr sz="2000" b="0">
                 <a:solidFill>
                   <a:srgbClr val="333333"/>
                 </a:solidFill>
+                <a:latin typeface="Calibri"/>
               </a:defRPr>
             </a:pPr>
             <a:r>
-              <a:t>Fix common permission denied and command not found errors</a:t>
+              <a:t>• Fix common permission denied and command not found</a:t>
+            </a:r>
+          </a:p>
+          <a:p>
+            <a:pPr>
+              <a:lnSpc>
+                <a:spcPts val="2200"/>
+              </a:lnSpc>
+              <a:spcAft>
+                <a:spcPts val="1000"/>
+              </a:spcAft>
+              <a:defRPr sz="2000" b="0">
+                <a:solidFill>
+                  <a:srgbClr val="333333"/>
+                </a:solidFill>
+                <a:latin typeface="Calibri"/>
+              </a:defRPr>
+            </a:pPr>
+            <a:r>
+              <a:t>      errors</a:t>
             </a:r>
           </a:p>
         </p:txBody>
@@ -4021,16 +4164,20 @@
           <a:noFill/>
         </p:spPr>
         <p:txBody>
-          <a:bodyPr wrap="none">
-            <a:spAutoFit/>
+          <a:bodyPr wrap="square">
+            <a:noAutofit/>
           </a:bodyPr>
           <a:lstStyle/>
           <a:p>
             <a:pPr algn="r">
-              <a:defRPr sz="1000">
+              <a:lnSpc>
+                <a:spcPts val="2200"/>
+              </a:lnSpc>
+              <a:defRPr sz="1000" b="0">
                 <a:solidFill>
                   <a:srgbClr val="666666"/>
                 </a:solidFill>
+                <a:latin typeface="Calibri"/>
               </a:defRPr>
             </a:pPr>
             <a:r>
@@ -4065,8 +4212,8 @@
         </p:nvSpPr>
         <p:spPr>
           <a:xfrm>
-            <a:off x="548640" y="457200"/>
-            <a:ext cx="11064240" cy="731520"/>
+            <a:off x="548640" y="411480"/>
+            <a:ext cx="11064240" cy="777240"/>
           </a:xfrm>
           <a:prstGeom prst="rect">
             <a:avLst/>
@@ -4074,16 +4221,20 @@
           <a:noFill/>
         </p:spPr>
         <p:txBody>
-          <a:bodyPr wrap="none">
-            <a:spAutoFit/>
+          <a:bodyPr wrap="square">
+            <a:noAutofit/>
           </a:bodyPr>
           <a:lstStyle/>
           <a:p>
             <a:pPr>
-              <a:defRPr sz="3200" b="1">
+              <a:lnSpc>
+                <a:spcPts val="2200"/>
+              </a:lnSpc>
+              <a:defRPr sz="2800" b="1">
                 <a:solidFill>
                   <a:srgbClr val="1A1A2E"/>
                 </a:solidFill>
+                <a:latin typeface="Calibri"/>
               </a:defRPr>
             </a:pPr>
             <a:r>
@@ -4100,8 +4251,8 @@
         </p:nvSpPr>
         <p:spPr>
           <a:xfrm>
-            <a:off x="548640" y="1280160"/>
-            <a:ext cx="11064240" cy="4754880"/>
+            <a:off x="548640" y="1234440"/>
+            <a:ext cx="11064240" cy="4937760"/>
           </a:xfrm>
           <a:prstGeom prst="rect">
             <a:avLst/>
@@ -4110,22 +4261,26 @@
         </p:spPr>
         <p:txBody>
           <a:bodyPr wrap="square">
-            <a:spAutoFit/>
+            <a:noAutofit/>
           </a:bodyPr>
           <a:lstStyle/>
           <a:p>
             <a:pPr>
+              <a:lnSpc>
+                <a:spcPts val="2200"/>
+              </a:lnSpc>
               <a:spcAft>
-                <a:spcPts val="800"/>
+                <a:spcPts val="1000"/>
               </a:spcAft>
-              <a:defRPr sz="2000">
+              <a:defRPr sz="2000" b="0">
                 <a:solidFill>
                   <a:srgbClr val="333333"/>
                 </a:solidFill>
+                <a:latin typeface="Calibri"/>
               </a:defRPr>
             </a:pPr>
             <a:r>
-              <a:t>Module 1 complete (cd, ls, pwd, basic files)</a:t>
+              <a:t>• Module 1 complete (cd, ls, pwd, basic files)</a:t>
             </a:r>
           </a:p>
         </p:txBody>
@@ -4147,16 +4302,20 @@
           <a:noFill/>
         </p:spPr>
         <p:txBody>
-          <a:bodyPr wrap="none">
-            <a:spAutoFit/>
+          <a:bodyPr wrap="square">
+            <a:noAutofit/>
           </a:bodyPr>
           <a:lstStyle/>
           <a:p>
             <a:pPr algn="r">
-              <a:defRPr sz="1000">
+              <a:lnSpc>
+                <a:spcPts val="2200"/>
+              </a:lnSpc>
+              <a:defRPr sz="1000" b="0">
                 <a:solidFill>
                   <a:srgbClr val="666666"/>
                 </a:solidFill>
+                <a:latin typeface="Calibri"/>
               </a:defRPr>
             </a:pPr>
             <a:r>
@@ -4191,8 +4350,8 @@
         </p:nvSpPr>
         <p:spPr>
           <a:xfrm>
-            <a:off x="548640" y="457200"/>
-            <a:ext cx="11064240" cy="731520"/>
+            <a:off x="548640" y="411480"/>
+            <a:ext cx="11064240" cy="777240"/>
           </a:xfrm>
           <a:prstGeom prst="rect">
             <a:avLst/>
@@ -4200,16 +4359,20 @@
           <a:noFill/>
         </p:spPr>
         <p:txBody>
-          <a:bodyPr wrap="none">
-            <a:spAutoFit/>
+          <a:bodyPr wrap="square">
+            <a:noAutofit/>
           </a:bodyPr>
           <a:lstStyle/>
           <a:p>
             <a:pPr>
-              <a:defRPr sz="3200" b="1">
+              <a:lnSpc>
+                <a:spcPts val="2200"/>
+              </a:lnSpc>
+              <a:defRPr sz="2800" b="1">
                 <a:solidFill>
                   <a:srgbClr val="1A1A2E"/>
                 </a:solidFill>
+                <a:latin typeface="Calibri"/>
               </a:defRPr>
             </a:pPr>
             <a:r>
@@ -4234,8 +4397,8 @@
         </p:blipFill>
         <p:spPr>
           <a:xfrm>
-            <a:off x="548640" y="1234440"/>
-            <a:ext cx="11064240" cy="4389120"/>
+            <a:off x="548640" y="1143000"/>
+            <a:ext cx="8128000" cy="4572000"/>
           </a:xfrm>
           <a:prstGeom prst="rect">
             <a:avLst/>
@@ -4259,16 +4422,20 @@
           <a:noFill/>
         </p:spPr>
         <p:txBody>
-          <a:bodyPr wrap="none">
-            <a:spAutoFit/>
+          <a:bodyPr wrap="square">
+            <a:noAutofit/>
           </a:bodyPr>
           <a:lstStyle/>
           <a:p>
             <a:pPr algn="r">
-              <a:defRPr sz="1000">
+              <a:lnSpc>
+                <a:spcPts val="2200"/>
+              </a:lnSpc>
+              <a:defRPr sz="1000" b="0">
                 <a:solidFill>
                   <a:srgbClr val="666666"/>
                 </a:solidFill>
+                <a:latin typeface="Calibri"/>
               </a:defRPr>
             </a:pPr>
             <a:r>
@@ -4303,8 +4470,8 @@
         </p:nvSpPr>
         <p:spPr>
           <a:xfrm>
-            <a:off x="548640" y="457200"/>
-            <a:ext cx="11064240" cy="731520"/>
+            <a:off x="548640" y="411480"/>
+            <a:ext cx="11064240" cy="777240"/>
           </a:xfrm>
           <a:prstGeom prst="rect">
             <a:avLst/>
@@ -4312,16 +4479,20 @@
           <a:noFill/>
         </p:spPr>
         <p:txBody>
-          <a:bodyPr wrap="none">
-            <a:spAutoFit/>
+          <a:bodyPr wrap="square">
+            <a:noAutofit/>
           </a:bodyPr>
           <a:lstStyle/>
           <a:p>
             <a:pPr>
-              <a:defRPr sz="3200" b="1">
+              <a:lnSpc>
+                <a:spcPts val="2200"/>
+              </a:lnSpc>
+              <a:defRPr sz="2800" b="1">
                 <a:solidFill>
                   <a:srgbClr val="1A1A2E"/>
                 </a:solidFill>
+                <a:latin typeface="Calibri"/>
               </a:defRPr>
             </a:pPr>
             <a:r>
@@ -4338,8 +4509,8 @@
         </p:nvSpPr>
         <p:spPr>
           <a:xfrm>
-            <a:off x="548640" y="1280160"/>
-            <a:ext cx="11064240" cy="4754880"/>
+            <a:off x="548640" y="1234440"/>
+            <a:ext cx="11064240" cy="4937760"/>
           </a:xfrm>
           <a:prstGeom prst="rect">
             <a:avLst/>
@@ -4348,52 +4519,64 @@
         </p:spPr>
         <p:txBody>
           <a:bodyPr wrap="square">
-            <a:spAutoFit/>
+            <a:noAutofit/>
           </a:bodyPr>
           <a:lstStyle/>
           <a:p>
             <a:pPr>
+              <a:lnSpc>
+                <a:spcPts val="2200"/>
+              </a:lnSpc>
               <a:spcAft>
-                <a:spcPts val="800"/>
+                <a:spcPts val="1000"/>
               </a:spcAft>
-              <a:defRPr sz="2000">
+              <a:defRPr sz="2000" b="0">
                 <a:solidFill>
                   <a:srgbClr val="333333"/>
                 </a:solidFill>
+                <a:latin typeface="Calibri"/>
               </a:defRPr>
             </a:pPr>
             <a:r>
-              <a:t>Simulators and tools depend on PATH</a:t>
+              <a:t>• Simulators and tools depend on PATH</a:t>
             </a:r>
           </a:p>
           <a:p>
             <a:pPr>
+              <a:lnSpc>
+                <a:spcPts val="2200"/>
+              </a:lnSpc>
               <a:spcAft>
-                <a:spcPts val="800"/>
+                <a:spcPts val="1000"/>
               </a:spcAft>
-              <a:defRPr sz="2000">
+              <a:defRPr sz="2000" b="0">
                 <a:solidFill>
                   <a:srgbClr val="333333"/>
                 </a:solidFill>
+                <a:latin typeface="Calibri"/>
               </a:defRPr>
             </a:pPr>
             <a:r>
-              <a:t>Scripts in projects need chmod +x</a:t>
+              <a:t>• Scripts in projects need chmod +x</a:t>
             </a:r>
           </a:p>
           <a:p>
             <a:pPr>
+              <a:lnSpc>
+                <a:spcPts val="2200"/>
+              </a:lnSpc>
               <a:spcAft>
-                <a:spcPts val="800"/>
+                <a:spcPts val="1000"/>
               </a:spcAft>
-              <a:defRPr sz="2000">
+              <a:defRPr sz="2000" b="0">
                 <a:solidFill>
                   <a:srgbClr val="333333"/>
                 </a:solidFill>
+                <a:latin typeface="Calibri"/>
               </a:defRPr>
             </a:pPr>
             <a:r>
-              <a:t>Dotfiles like .gitignore appear in every repo</a:t>
+              <a:t>• Dotfiles like .gitignore appear in every repo</a:t>
             </a:r>
           </a:p>
         </p:txBody>
@@ -4415,16 +4598,20 @@
           <a:noFill/>
         </p:spPr>
         <p:txBody>
-          <a:bodyPr wrap="none">
-            <a:spAutoFit/>
+          <a:bodyPr wrap="square">
+            <a:noAutofit/>
           </a:bodyPr>
           <a:lstStyle/>
           <a:p>
             <a:pPr algn="r">
-              <a:defRPr sz="1000">
+              <a:lnSpc>
+                <a:spcPts val="2200"/>
+              </a:lnSpc>
+              <a:defRPr sz="1000" b="0">
                 <a:solidFill>
                   <a:srgbClr val="666666"/>
                 </a:solidFill>
+                <a:latin typeface="Calibri"/>
               </a:defRPr>
             </a:pPr>
             <a:r>
@@ -4468,13 +4655,21 @@
           <a:noFill/>
         </p:spPr>
         <p:txBody>
-          <a:bodyPr wrap="none">
-            <a:spAutoFit/>
+          <a:bodyPr wrap="square">
+            <a:noAutofit/>
           </a:bodyPr>
           <a:lstStyle/>
           <a:p>
             <a:pPr algn="ctr">
-              <a:defRPr sz="4000" b="1"/>
+              <a:lnSpc>
+                <a:spcPts val="2200"/>
+              </a:lnSpc>
+              <a:defRPr sz="3600" b="1">
+                <a:solidFill>
+                  <a:srgbClr val="1A1A2E"/>
+                </a:solidFill>
+                <a:latin typeface="Calibri"/>
+              </a:defRPr>
             </a:pPr>
             <a:r>
               <a:t>Core topics</a:t>
@@ -4499,16 +4694,20 @@
           <a:noFill/>
         </p:spPr>
         <p:txBody>
-          <a:bodyPr wrap="none">
-            <a:spAutoFit/>
+          <a:bodyPr wrap="square">
+            <a:noAutofit/>
           </a:bodyPr>
           <a:lstStyle/>
           <a:p>
             <a:pPr algn="r">
-              <a:defRPr sz="1000">
+              <a:lnSpc>
+                <a:spcPts val="2200"/>
+              </a:lnSpc>
+              <a:defRPr sz="1000" b="0">
                 <a:solidFill>
                   <a:srgbClr val="666666"/>
                 </a:solidFill>
+                <a:latin typeface="Calibri"/>
               </a:defRPr>
             </a:pPr>
             <a:r>
@@ -4543,8 +4742,8 @@
         </p:nvSpPr>
         <p:spPr>
           <a:xfrm>
-            <a:off x="548640" y="457200"/>
-            <a:ext cx="11064240" cy="731520"/>
+            <a:off x="548640" y="411480"/>
+            <a:ext cx="11064240" cy="777240"/>
           </a:xfrm>
           <a:prstGeom prst="rect">
             <a:avLst/>
@@ -4552,16 +4751,20 @@
           <a:noFill/>
         </p:spPr>
         <p:txBody>
-          <a:bodyPr wrap="none">
-            <a:spAutoFit/>
+          <a:bodyPr wrap="square">
+            <a:noAutofit/>
           </a:bodyPr>
           <a:lstStyle/>
           <a:p>
             <a:pPr>
-              <a:defRPr sz="3200" b="1">
+              <a:lnSpc>
+                <a:spcPts val="2200"/>
+              </a:lnSpc>
+              <a:defRPr sz="2800" b="1">
                 <a:solidFill>
                   <a:srgbClr val="1A1A2E"/>
                 </a:solidFill>
+                <a:latin typeface="Calibri"/>
               </a:defRPr>
             </a:pPr>
             <a:r>
@@ -4578,22 +4781,33 @@
         </p:nvSpPr>
         <p:spPr>
           <a:xfrm>
-            <a:off x="548640" y="1143000"/>
-            <a:ext cx="11064240" cy="548640"/>
+            <a:off x="548640" y="1051560"/>
+            <a:ext cx="11064240" cy="914400"/>
           </a:xfrm>
           <a:prstGeom prst="rect">
             <a:avLst/>
           </a:prstGeom>
-          <a:noFill/>
-        </p:spPr>
-        <p:txBody>
-          <a:bodyPr wrap="none">
-            <a:spAutoFit/>
+          <a:solidFill>
+            <a:srgbClr val="F4F4F4"/>
+          </a:solidFill>
+        </p:spPr>
+        <p:txBody>
+          <a:bodyPr wrap="square">
+            <a:noAutofit/>
           </a:bodyPr>
           <a:lstStyle/>
           <a:p>
             <a:pPr>
-              <a:defRPr sz="1400">
+              <a:lnSpc>
+                <a:spcPts val="2200"/>
+              </a:lnSpc>
+              <a:spcAft>
+                <a:spcPts val="200"/>
+              </a:spcAft>
+              <a:defRPr sz="2000" b="0">
+                <a:solidFill>
+                  <a:srgbClr val="333333"/>
+                </a:solidFill>
                 <a:latin typeface="Consolas"/>
               </a:defRPr>
             </a:pPr>
@@ -4619,8 +4833,8 @@
         </p:blipFill>
         <p:spPr>
           <a:xfrm>
-            <a:off x="548640" y="1828800"/>
-            <a:ext cx="11064240" cy="3840480"/>
+            <a:off x="548640" y="1965960"/>
+            <a:ext cx="7071358" cy="3977639"/>
           </a:xfrm>
           <a:prstGeom prst="rect">
             <a:avLst/>
@@ -4644,16 +4858,20 @@
           <a:noFill/>
         </p:spPr>
         <p:txBody>
-          <a:bodyPr wrap="none">
-            <a:spAutoFit/>
+          <a:bodyPr wrap="square">
+            <a:noAutofit/>
           </a:bodyPr>
           <a:lstStyle/>
           <a:p>
             <a:pPr algn="r">
-              <a:defRPr sz="1000">
+              <a:lnSpc>
+                <a:spcPts val="2200"/>
+              </a:lnSpc>
+              <a:defRPr sz="1000" b="0">
                 <a:solidFill>
                   <a:srgbClr val="666666"/>
                 </a:solidFill>
+                <a:latin typeface="Calibri"/>
               </a:defRPr>
             </a:pPr>
             <a:r>
@@ -4688,8 +4906,8 @@
         </p:nvSpPr>
         <p:spPr>
           <a:xfrm>
-            <a:off x="548640" y="457200"/>
-            <a:ext cx="11064240" cy="731520"/>
+            <a:off x="548640" y="411480"/>
+            <a:ext cx="11064240" cy="777240"/>
           </a:xfrm>
           <a:prstGeom prst="rect">
             <a:avLst/>
@@ -4697,16 +4915,20 @@
           <a:noFill/>
         </p:spPr>
         <p:txBody>
-          <a:bodyPr wrap="none">
-            <a:spAutoFit/>
+          <a:bodyPr wrap="square">
+            <a:noAutofit/>
           </a:bodyPr>
           <a:lstStyle/>
           <a:p>
             <a:pPr>
-              <a:defRPr sz="3200" b="1">
+              <a:lnSpc>
+                <a:spcPts val="2200"/>
+              </a:lnSpc>
+              <a:defRPr sz="2800" b="1">
                 <a:solidFill>
                   <a:srgbClr val="1A1A2E"/>
                 </a:solidFill>
+                <a:latin typeface="Calibri"/>
               </a:defRPr>
             </a:pPr>
             <a:r>
@@ -4723,7 +4945,7 @@
         </p:nvSpPr>
         <p:spPr>
           <a:xfrm>
-            <a:off x="548640" y="1234440"/>
+            <a:off x="548640" y="1143000"/>
             <a:ext cx="11064240" cy="5029200"/>
           </a:xfrm>
           <a:prstGeom prst="rect">
@@ -4735,12 +4957,18 @@
         </p:spPr>
         <p:txBody>
           <a:bodyPr wrap="square">
-            <a:spAutoFit/>
+            <a:noAutofit/>
           </a:bodyPr>
           <a:lstStyle/>
           <a:p>
             <a:pPr>
-              <a:defRPr sz="1400">
+              <a:lnSpc>
+                <a:spcPts val="2200"/>
+              </a:lnSpc>
+              <a:spcAft>
+                <a:spcPts val="400"/>
+              </a:spcAft>
+              <a:defRPr sz="2000" b="0">
                 <a:solidFill>
                   <a:srgbClr val="333333"/>
                 </a:solidFill>
@@ -4750,7 +4978,22 @@
             <a:r>
               <a:t>chmod u+x hello.sh</a:t>
             </a:r>
-            <a:br/>
+          </a:p>
+          <a:p>
+            <a:pPr>
+              <a:lnSpc>
+                <a:spcPts val="2200"/>
+              </a:lnSpc>
+              <a:spcAft>
+                <a:spcPts val="400"/>
+              </a:spcAft>
+              <a:defRPr sz="2000" b="0">
+                <a:solidFill>
+                  <a:srgbClr val="333333"/>
+                </a:solidFill>
+                <a:latin typeface="Consolas"/>
+              </a:defRPr>
+            </a:pPr>
             <a:r>
               <a:t>./hello.sh</a:t>
             </a:r>
@@ -4774,16 +5017,20 @@
           <a:noFill/>
         </p:spPr>
         <p:txBody>
-          <a:bodyPr wrap="none">
-            <a:spAutoFit/>
+          <a:bodyPr wrap="square">
+            <a:noAutofit/>
           </a:bodyPr>
           <a:lstStyle/>
           <a:p>
             <a:pPr algn="r">
-              <a:defRPr sz="1000">
+              <a:lnSpc>
+                <a:spcPts val="2200"/>
+              </a:lnSpc>
+              <a:defRPr sz="1000" b="0">
                 <a:solidFill>
                   <a:srgbClr val="666666"/>
                 </a:solidFill>
+                <a:latin typeface="Calibri"/>
               </a:defRPr>
             </a:pPr>
             <a:r>
@@ -4818,8 +5065,8 @@
         </p:nvSpPr>
         <p:spPr>
           <a:xfrm>
-            <a:off x="548640" y="457200"/>
-            <a:ext cx="11064240" cy="731520"/>
+            <a:off x="548640" y="411480"/>
+            <a:ext cx="11064240" cy="777240"/>
           </a:xfrm>
           <a:prstGeom prst="rect">
             <a:avLst/>
@@ -4827,16 +5074,20 @@
           <a:noFill/>
         </p:spPr>
         <p:txBody>
-          <a:bodyPr wrap="none">
-            <a:spAutoFit/>
+          <a:bodyPr wrap="square">
+            <a:noAutofit/>
           </a:bodyPr>
           <a:lstStyle/>
           <a:p>
             <a:pPr>
-              <a:defRPr sz="3200" b="1">
+              <a:lnSpc>
+                <a:spcPts val="2200"/>
+              </a:lnSpc>
+              <a:defRPr sz="2800" b="1">
                 <a:solidFill>
                   <a:srgbClr val="1A1A2E"/>
                 </a:solidFill>
+                <a:latin typeface="Calibri"/>
               </a:defRPr>
             </a:pPr>
             <a:r>
@@ -4853,22 +5104,33 @@
         </p:nvSpPr>
         <p:spPr>
           <a:xfrm>
-            <a:off x="548640" y="1143000"/>
-            <a:ext cx="11064240" cy="548640"/>
+            <a:off x="548640" y="1051560"/>
+            <a:ext cx="11064240" cy="914400"/>
           </a:xfrm>
           <a:prstGeom prst="rect">
             <a:avLst/>
           </a:prstGeom>
-          <a:noFill/>
-        </p:spPr>
-        <p:txBody>
-          <a:bodyPr wrap="none">
-            <a:spAutoFit/>
+          <a:solidFill>
+            <a:srgbClr val="F4F4F4"/>
+          </a:solidFill>
+        </p:spPr>
+        <p:txBody>
+          <a:bodyPr wrap="square">
+            <a:noAutofit/>
           </a:bodyPr>
           <a:lstStyle/>
           <a:p>
             <a:pPr>
-              <a:defRPr sz="1400">
+              <a:lnSpc>
+                <a:spcPts val="2200"/>
+              </a:lnSpc>
+              <a:spcAft>
+                <a:spcPts val="200"/>
+              </a:spcAft>
+              <a:defRPr sz="2000" b="0">
+                <a:solidFill>
+                  <a:srgbClr val="333333"/>
+                </a:solidFill>
                 <a:latin typeface="Consolas"/>
               </a:defRPr>
             </a:pPr>
@@ -4894,8 +5156,8 @@
         </p:blipFill>
         <p:spPr>
           <a:xfrm>
-            <a:off x="548640" y="1828800"/>
-            <a:ext cx="11064240" cy="3840480"/>
+            <a:off x="548640" y="1965960"/>
+            <a:ext cx="7071358" cy="3977639"/>
           </a:xfrm>
           <a:prstGeom prst="rect">
             <a:avLst/>
@@ -4919,16 +5181,20 @@
           <a:noFill/>
         </p:spPr>
         <p:txBody>
-          <a:bodyPr wrap="none">
-            <a:spAutoFit/>
+          <a:bodyPr wrap="square">
+            <a:noAutofit/>
           </a:bodyPr>
           <a:lstStyle/>
           <a:p>
             <a:pPr algn="r">
-              <a:defRPr sz="1000">
+              <a:lnSpc>
+                <a:spcPts val="2200"/>
+              </a:lnSpc>
+              <a:defRPr sz="1000" b="0">
                 <a:solidFill>
                   <a:srgbClr val="666666"/>
                 </a:solidFill>
+                <a:latin typeface="Calibri"/>
               </a:defRPr>
             </a:pPr>
             <a:r>
